--- a/PPT/Playtesting.pptx
+++ b/PPT/Playtesting.pptx
@@ -274,7 +274,7 @@
           <a:p>
             <a:fld id="{5E322444-AC78-4D7E-B8B8-5ACC761D4F45}" type="datetimeFigureOut">
               <a:rPr lang="en-US" smtClean="0"/>
-              <a:t>3/7/2025</a:t>
+              <a:t>7/20/2026</a:t>
             </a:fld>
             <a:endParaRPr lang="en-US"/>
           </a:p>
@@ -472,7 +472,7 @@
           <a:p>
             <a:fld id="{5E322444-AC78-4D7E-B8B8-5ACC761D4F45}" type="datetimeFigureOut">
               <a:rPr lang="en-US" smtClean="0"/>
-              <a:t>3/7/2025</a:t>
+              <a:t>7/20/2026</a:t>
             </a:fld>
             <a:endParaRPr lang="en-US"/>
           </a:p>
@@ -680,7 +680,7 @@
           <a:p>
             <a:fld id="{5E322444-AC78-4D7E-B8B8-5ACC761D4F45}" type="datetimeFigureOut">
               <a:rPr lang="en-US" smtClean="0"/>
-              <a:t>3/7/2025</a:t>
+              <a:t>7/20/2026</a:t>
             </a:fld>
             <a:endParaRPr lang="en-US"/>
           </a:p>
@@ -878,7 +878,7 @@
           <a:p>
             <a:fld id="{5E322444-AC78-4D7E-B8B8-5ACC761D4F45}" type="datetimeFigureOut">
               <a:rPr lang="en-US" smtClean="0"/>
-              <a:t>3/7/2025</a:t>
+              <a:t>7/20/2026</a:t>
             </a:fld>
             <a:endParaRPr lang="en-US"/>
           </a:p>
@@ -1153,7 +1153,7 @@
           <a:p>
             <a:fld id="{5E322444-AC78-4D7E-B8B8-5ACC761D4F45}" type="datetimeFigureOut">
               <a:rPr lang="en-US" smtClean="0"/>
-              <a:t>3/7/2025</a:t>
+              <a:t>7/20/2026</a:t>
             </a:fld>
             <a:endParaRPr lang="en-US"/>
           </a:p>
@@ -1418,7 +1418,7 @@
           <a:p>
             <a:fld id="{5E322444-AC78-4D7E-B8B8-5ACC761D4F45}" type="datetimeFigureOut">
               <a:rPr lang="en-US" smtClean="0"/>
-              <a:t>3/7/2025</a:t>
+              <a:t>7/20/2026</a:t>
             </a:fld>
             <a:endParaRPr lang="en-US"/>
           </a:p>
@@ -1830,7 +1830,7 @@
           <a:p>
             <a:fld id="{5E322444-AC78-4D7E-B8B8-5ACC761D4F45}" type="datetimeFigureOut">
               <a:rPr lang="en-US" smtClean="0"/>
-              <a:t>3/7/2025</a:t>
+              <a:t>7/20/2026</a:t>
             </a:fld>
             <a:endParaRPr lang="en-US"/>
           </a:p>
@@ -1971,7 +1971,7 @@
           <a:p>
             <a:fld id="{5E322444-AC78-4D7E-B8B8-5ACC761D4F45}" type="datetimeFigureOut">
               <a:rPr lang="en-US" smtClean="0"/>
-              <a:t>3/7/2025</a:t>
+              <a:t>7/20/2026</a:t>
             </a:fld>
             <a:endParaRPr lang="en-US"/>
           </a:p>
@@ -2084,7 +2084,7 @@
           <a:p>
             <a:fld id="{5E322444-AC78-4D7E-B8B8-5ACC761D4F45}" type="datetimeFigureOut">
               <a:rPr lang="en-US" smtClean="0"/>
-              <a:t>3/7/2025</a:t>
+              <a:t>7/20/2026</a:t>
             </a:fld>
             <a:endParaRPr lang="en-US"/>
           </a:p>
@@ -2395,7 +2395,7 @@
           <a:p>
             <a:fld id="{5E322444-AC78-4D7E-B8B8-5ACC761D4F45}" type="datetimeFigureOut">
               <a:rPr lang="en-US" smtClean="0"/>
-              <a:t>3/7/2025</a:t>
+              <a:t>7/20/2026</a:t>
             </a:fld>
             <a:endParaRPr lang="en-US"/>
           </a:p>
@@ -2683,7 +2683,7 @@
           <a:p>
             <a:fld id="{5E322444-AC78-4D7E-B8B8-5ACC761D4F45}" type="datetimeFigureOut">
               <a:rPr lang="en-US" smtClean="0"/>
-              <a:t>3/7/2025</a:t>
+              <a:t>7/20/2026</a:t>
             </a:fld>
             <a:endParaRPr lang="en-US"/>
           </a:p>
@@ -2924,7 +2924,7 @@
           <a:p>
             <a:fld id="{5E322444-AC78-4D7E-B8B8-5ACC761D4F45}" type="datetimeFigureOut">
               <a:rPr lang="en-US" smtClean="0"/>
-              <a:t>3/7/2025</a:t>
+              <a:t>7/20/2026</a:t>
             </a:fld>
             <a:endParaRPr lang="en-US"/>
           </a:p>
@@ -4959,12 +4959,8 @@
           <a:lstStyle/>
           <a:p>
             <a:r>
-              <a:rPr lang="en-US" dirty="0" err="1"/>
-              <a:t>Playtseting</a:t>
-            </a:r>
-            <a:r>
-              <a:rPr lang="en-US" dirty="0"/>
-              <a:t> Goals</a:t>
+              <a:rPr lang="en-US" dirty="0"/>
+              <a:t>Playtesting Goals</a:t>
             </a:r>
           </a:p>
         </p:txBody>
@@ -5115,8 +5111,12 @@
           <a:p>
             <a:pPr lvl="0"/>
             <a:r>
-              <a:rPr lang="en-US" dirty="0"/>
-              <a:t>Designers role: Advocate for the user</a:t>
+              <a:rPr lang="en-US"/>
+              <a:t>Designer’s </a:t>
+            </a:r>
+            <a:r>
+              <a:rPr lang="en-US" dirty="0"/>
+              <a:t>role: Advocate for the user</a:t>
             </a:r>
           </a:p>
           <a:p>
